--- a/classes/parte-17-profundizacion-para-certificaciones/323-pruebas-de-seguridad-del-software-y-evaluacion/clase-323-presentacion.pptx
+++ b/classes/parte-17-profundizacion-para-certificaciones/323-pruebas-de-seguridad-del-software-y-evaluacion/clase-323-presentacion.pptx
@@ -17,6 +17,10 @@
     <p:sldId id="265" r:id="rId16"/>
     <p:sldId id="266" r:id="rId17"/>
     <p:sldId id="267" r:id="rId18"/>
+    <p:sldId id="268" r:id="rId19"/>
+    <p:sldId id="269" r:id="rId20"/>
+    <p:sldId id="270" r:id="rId21"/>
+    <p:sldId id="271" r:id="rId22"/>
   </p:sldIdLst>
   <p:sldSz cx="9144000" cy="6858000" type="screen4x3"/>
   <p:notesSz cx="6858000" cy="9144000"/>
@@ -3198,7 +3202,7 @@
                   <a:srgbClr val="0B3D2E"/>
                 </a:solidFill>
               </a:rPr>
-              <a:t>⚠️ Errores comunes</a:t>
+              <a:t>🧪 Laboratorio guiado — Revisión de código y evaluación de una app de práctica</a:t>
             </a:r>
           </a:p>
         </p:txBody>
@@ -3236,82 +3240,97 @@
                   <a:srgbClr val="22282E"/>
                 </a:solidFill>
               </a:rPr>
-              <a:t>•  "SAST reporta 500 hallazgos, imposible revisarlos" — Falta triage y contexto. Filtra por severidad, agrupa por regla y descarta patrones de falso positivo.</a:t>
-            </a:r>
-          </a:p>
-          <a:p>
-            <a:pPr>
-              <a:spcAft>
-                <a:spcPts val="600"/>
-              </a:spcAft>
-            </a:pPr>
-            <a:r>
-              <a:rPr sz="1500">
-                <a:solidFill>
-                  <a:srgbClr val="22282E"/>
-                </a:solidFill>
-              </a:rPr>
-              <a:t>•  "DAST no encontró la vulnerabilidad que sé que existe" — DAST solo ve lo que alcanza. Complementa con SAST y revisión manual (cobertura).</a:t>
-            </a:r>
-          </a:p>
-          <a:p>
-            <a:pPr>
-              <a:spcAft>
-                <a:spcPts val="600"/>
-              </a:spcAft>
-            </a:pPr>
-            <a:r>
-              <a:rPr sz="1500">
-                <a:solidFill>
-                  <a:srgbClr val="22282E"/>
-                </a:solidFill>
-              </a:rPr>
-              <a:t>•  "La herramienta no vio el fallo de lógica de negocio" — Ninguna herramienta razona la lógica. Eso exige revisión manual guiada por checklist.</a:t>
-            </a:r>
-          </a:p>
-          <a:p>
-            <a:pPr>
-              <a:spcAft>
-                <a:spcPts val="600"/>
-              </a:spcAft>
-            </a:pPr>
-            <a:r>
-              <a:rPr sz="1500">
-                <a:solidFill>
-                  <a:srgbClr val="22282E"/>
-                </a:solidFill>
-              </a:rPr>
-              <a:t>•  "Corrimos las pruebas justo antes de producción" — Demasiado tarde. Integra SAST/SCA en el pipeline (shift-left) para corregir barato.</a:t>
-            </a:r>
-          </a:p>
-          <a:p>
-            <a:pPr>
-              <a:spcAft>
-                <a:spcPts val="600"/>
-              </a:spcAft>
-            </a:pPr>
-            <a:r>
-              <a:rPr sz="1500">
-                <a:solidFill>
-                  <a:srgbClr val="22282E"/>
-                </a:solidFill>
-              </a:rPr>
-              <a:t>•  "Reportamos hallazgos pero nadie los arregla" — Sin dueño ni SLA no hay remediación. Asigna responsable y plazo por severidad.</a:t>
-            </a:r>
-          </a:p>
-          <a:p>
-            <a:pPr>
-              <a:spcAft>
-                <a:spcPts val="600"/>
-              </a:spcAft>
-            </a:pPr>
-            <a:r>
-              <a:rPr sz="1500">
-                <a:solidFill>
-                  <a:srgbClr val="22282E"/>
-                </a:solidFill>
-              </a:rPr>
-              <a:t>•  "Probamos una app de un tercero sin permiso" — Es ilegal. Toda prueba requiere autorización por escrito y entorno autorizado.</a:t>
+              <a:t>•  Ejercicio aplicado: evalúas una aplicación vulnerable de laboratorio combinando revisión manual y herramientas, y gestionas los hallazgos.</a:t>
+            </a:r>
+          </a:p>
+          <a:p>
+            <a:pPr>
+              <a:spcAft>
+                <a:spcPts val="600"/>
+              </a:spcAft>
+            </a:pPr>
+            <a:r>
+              <a:rPr sz="1500">
+                <a:solidFill>
+                  <a:srgbClr val="22282E"/>
+                </a:solidFill>
+              </a:rPr>
+              <a:t>•  Prepara el entorno. Despliega la app de práctica en una VM/contenedor aislado sin acceso a producción. Confirma el alcance por escrito: qué se prueba y qué queda fuera.</a:t>
+            </a:r>
+          </a:p>
+          <a:p>
+            <a:pPr>
+              <a:spcAft>
+                <a:spcPts val="600"/>
+              </a:spcAft>
+            </a:pPr>
+            <a:r>
+              <a:rPr sz="1500">
+                <a:solidFill>
+                  <a:srgbClr val="22282E"/>
+                </a:solidFill>
+              </a:rPr>
+              <a:t>•  Pasa SCA. Ejecuta el análisis de dependencias y anota las librerías con CVE conocidos y su severidad. Es el hallazgo más rápido y frecuente.</a:t>
+            </a:r>
+          </a:p>
+          <a:p>
+            <a:pPr>
+              <a:spcAft>
+                <a:spcPts val="600"/>
+              </a:spcAft>
+            </a:pPr>
+            <a:r>
+              <a:rPr sz="1500">
+                <a:solidFill>
+                  <a:srgbClr val="22282E"/>
+                </a:solidFill>
+              </a:rPr>
+              <a:t>•  Ejecuta SAST. Corre Semgrep/SonarQube sobre el código. Exporta los hallazgos con su CWE y descarta ruido evidente (marcando el criterio del triage).</a:t>
+            </a:r>
+          </a:p>
+          <a:p>
+            <a:pPr>
+              <a:spcAft>
+                <a:spcPts val="600"/>
+              </a:spcAft>
+            </a:pPr>
+            <a:r>
+              <a:rPr sz="1500">
+                <a:solidFill>
+                  <a:srgbClr val="22282E"/>
+                </a:solidFill>
+              </a:rPr>
+              <a:t>•  Haz la revisión de código guiada. Con checklist ASVS, revisa manualmente cuatro zonas: autenticación/sesión, validación de entrada, criptografía/almacenamiento de secretos y manejo de…</a:t>
+            </a:r>
+          </a:p>
+          <a:p>
+            <a:pPr>
+              <a:spcAft>
+                <a:spcPts val="600"/>
+              </a:spcAft>
+            </a:pPr>
+            <a:r>
+              <a:rPr sz="1500">
+                <a:solidFill>
+                  <a:srgbClr val="22282E"/>
+                </a:solidFill>
+              </a:rPr>
+              <a:t>•  Ejecuta DAST. Lanza ZAP contra la app en ejecución (escaneo pasivo y luego activo autorizado). Correlaciona sus hallazgos con los de SAST para confirmar explotabilidad.</a:t>
+            </a:r>
+          </a:p>
+          <a:p>
+            <a:pPr>
+              <a:spcAft>
+                <a:spcPts val="600"/>
+              </a:spcAft>
+            </a:pPr>
+            <a:r>
+              <a:rPr sz="1500">
+                <a:solidFill>
+                  <a:srgbClr val="22282E"/>
+                </a:solidFill>
+              </a:rPr>
+              <a:t>•  Consolida y deduplica. Une los hallazgos de SCA+SAST+DAST+revisión en un único registro. Marca duplicados y clasifica cada uno con severidad (CVSS/riesgo) y CWE.</a:t>
             </a:r>
           </a:p>
         </p:txBody>
@@ -3362,7 +3381,7 @@
                   <a:srgbClr val="0B3D2E"/>
                 </a:solidFill>
               </a:rPr>
-              <a:t>❓ Preguntas frecuentes</a:t>
+              <a:t>✍️ Ejercicios</a:t>
             </a:r>
           </a:p>
         </p:txBody>
@@ -3400,97 +3419,82 @@
                   <a:srgbClr val="22282E"/>
                 </a:solidFill>
               </a:rPr>
-              <a:t>•  ❓ ¿SAST o DAST, cuál elijo?</a:t>
-            </a:r>
-          </a:p>
-          <a:p>
-            <a:pPr>
-              <a:spcAft>
-                <a:spcPts val="600"/>
-              </a:spcAft>
-            </a:pPr>
-            <a:r>
-              <a:rPr sz="1500">
-                <a:solidFill>
-                  <a:srgbClr val="22282E"/>
-                </a:solidFill>
-              </a:rPr>
-              <a:t>•  Ambos: son complementarios. SAST ve el código temprano con muchos falsos positivos; DAST prueba la app viva con menos ruido pero cobertura limitada. Añade SCA para dependencias y revisión manual para la lógica.</a:t>
-            </a:r>
-          </a:p>
-          <a:p>
-            <a:pPr>
-              <a:spcAft>
-                <a:spcPts val="600"/>
-              </a:spcAft>
-            </a:pPr>
-            <a:r>
-              <a:rPr sz="1500">
-                <a:solidFill>
-                  <a:srgbClr val="22282E"/>
-                </a:solidFill>
-              </a:rPr>
-              <a:t>•  ❓ ¿Qué nivel de ASVS debo apuntar?</a:t>
-            </a:r>
-          </a:p>
-          <a:p>
-            <a:pPr>
-              <a:spcAft>
-                <a:spcPts val="600"/>
-              </a:spcAft>
-            </a:pPr>
-            <a:r>
-              <a:rPr sz="1500">
-                <a:solidFill>
-                  <a:srgbClr val="22282E"/>
-                </a:solidFill>
-              </a:rPr>
-              <a:t>•  L1 es una línea base para cualquier app; L2 es el objetivo típico de aplicaciones que manejan datos sensibles; L3 se reserva para sistemas de alto valor/vida crítica. Elige según el riesgo del activo.</a:t>
-            </a:r>
-          </a:p>
-          <a:p>
-            <a:pPr>
-              <a:spcAft>
-                <a:spcPts val="600"/>
-              </a:spcAft>
-            </a:pPr>
-            <a:r>
-              <a:rPr sz="1500">
-                <a:solidFill>
-                  <a:srgbClr val="22282E"/>
-                </a:solidFill>
-              </a:rPr>
-              <a:t>•  ❓ ¿La revisión manual sigue siendo necesaria con tantas herramientas?</a:t>
-            </a:r>
-          </a:p>
-          <a:p>
-            <a:pPr>
-              <a:spcAft>
-                <a:spcPts val="600"/>
-              </a:spcAft>
-            </a:pPr>
-            <a:r>
-              <a:rPr sz="1500">
-                <a:solidFill>
-                  <a:srgbClr val="22282E"/>
-                </a:solidFill>
-              </a:rPr>
-              <a:t>•  Sí. Las herramientas escalan la búsqueda de patrones conocidos, pero los fallos de lógica de negocio, control de acceso y flujos de autorización casi siempre requieren un revisor humano.</a:t>
-            </a:r>
-          </a:p>
-          <a:p>
-            <a:pPr>
-              <a:spcAft>
-                <a:spcPts val="600"/>
-              </a:spcAft>
-            </a:pPr>
-            <a:r>
-              <a:rPr sz="1500">
-                <a:solidFill>
-                  <a:srgbClr val="22282E"/>
-                </a:solidFill>
-              </a:rPr>
-              <a:t>•  ❓ ¿Cómo priorizo qué remediar primero?</a:t>
+              <a:t>•  Sitúa SAST, DAST, IAST y SCA en una línea del SDLC y explica el mejor momento de cada uno.</a:t>
+            </a:r>
+          </a:p>
+          <a:p>
+            <a:pPr>
+              <a:spcAft>
+                <a:spcPts val="600"/>
+              </a:spcAft>
+            </a:pPr>
+            <a:r>
+              <a:rPr sz="1500">
+                <a:solidFill>
+                  <a:srgbClr val="22282E"/>
+                </a:solidFill>
+              </a:rPr>
+              <a:t>•  Revisa un fragmento de código dado y encuentra dos fallos de validación de entrada, citando el CWE.</a:t>
+            </a:r>
+          </a:p>
+          <a:p>
+            <a:pPr>
+              <a:spcAft>
+                <a:spcPts val="600"/>
+              </a:spcAft>
+            </a:pPr>
+            <a:r>
+              <a:rPr sz="1500">
+                <a:solidFill>
+                  <a:srgbClr val="22282E"/>
+                </a:solidFill>
+              </a:rPr>
+              <a:t>•  Triage de diez hallazgos de SAST: marca falsos positivos con justificación.</a:t>
+            </a:r>
+          </a:p>
+          <a:p>
+            <a:pPr>
+              <a:spcAft>
+                <a:spcPts val="600"/>
+              </a:spcAft>
+            </a:pPr>
+            <a:r>
+              <a:rPr sz="1500">
+                <a:solidFill>
+                  <a:srgbClr val="22282E"/>
+                </a:solidFill>
+              </a:rPr>
+              <a:t>•  Mapea cinco hallazgos a requisitos ASVS y determina el nivel (L1/L2/L3) que incumplen.</a:t>
+            </a:r>
+          </a:p>
+          <a:p>
+            <a:pPr>
+              <a:spcAft>
+                <a:spcPts val="600"/>
+              </a:spcAft>
+            </a:pPr>
+            <a:r>
+              <a:rPr sz="1500">
+                <a:solidFill>
+                  <a:srgbClr val="22282E"/>
+                </a:solidFill>
+              </a:rPr>
+              <a:t>•  Define una política de SLA de remediación por severidad y justifícala con el riesgo.</a:t>
+            </a:r>
+          </a:p>
+          <a:p>
+            <a:pPr>
+              <a:spcAft>
+                <a:spcPts val="600"/>
+              </a:spcAft>
+            </a:pPr>
+            <a:r>
+              <a:rPr sz="1500">
+                <a:solidFill>
+                  <a:srgbClr val="22282E"/>
+                </a:solidFill>
+              </a:rPr>
+              <a:t>•  Correlaciona un hallazgo de SAST con uno de DAST para demostrar explotabilidad real.</a:t>
             </a:r>
           </a:p>
         </p:txBody>
@@ -3541,7 +3545,7 @@
                   <a:srgbClr val="0B3D2E"/>
                 </a:solidFill>
               </a:rPr>
-              <a:t>🔗 Referencias</a:t>
+              <a:t>📝 Reto verificable</a:t>
             </a:r>
           </a:p>
         </p:txBody>
@@ -3579,6 +3583,528 @@
                   <a:srgbClr val="22282E"/>
                 </a:solidFill>
               </a:rPr>
+              <a:t>•  Reto: entrega el informe de evaluación de seguridad de la app de práctica, con hallazgos gestionados y verificación ASVS.</a:t>
+            </a:r>
+          </a:p>
+          <a:p>
+            <a:pPr>
+              <a:spcAft>
+                <a:spcPts val="600"/>
+              </a:spcAft>
+            </a:pPr>
+            <a:r>
+              <a:rPr sz="1500">
+                <a:solidFill>
+                  <a:srgbClr val="22282E"/>
+                </a:solidFill>
+              </a:rPr>
+              <a:t>•  Criterio de aceptación:</a:t>
+            </a:r>
+          </a:p>
+          <a:p>
+            <a:pPr>
+              <a:spcAft>
+                <a:spcPts val="600"/>
+              </a:spcAft>
+            </a:pPr>
+            <a:r>
+              <a:rPr sz="1500">
+                <a:solidFill>
+                  <a:srgbClr val="22282E"/>
+                </a:solidFill>
+              </a:rPr>
+              <a:t>•  Se combinaron al menos tres técnicas (SCA, SAST, DAST y/o revisión manual) sobre software propio/autorizado en entorno aislado.</a:t>
+            </a:r>
+          </a:p>
+          <a:p>
+            <a:pPr>
+              <a:spcAft>
+                <a:spcPts val="600"/>
+              </a:spcAft>
+            </a:pPr>
+            <a:r>
+              <a:rPr sz="1500">
+                <a:solidFill>
+                  <a:srgbClr val="22282E"/>
+                </a:solidFill>
+              </a:rPr>
+              <a:t>•  El registro de hallazgos está deduplicado, con severidad, CWE, dueño y SLA por hallazgo.</a:t>
+            </a:r>
+          </a:p>
+          <a:p>
+            <a:pPr>
+              <a:spcAft>
+                <a:spcPts val="600"/>
+              </a:spcAft>
+            </a:pPr>
+            <a:r>
+              <a:rPr sz="1500">
+                <a:solidFill>
+                  <a:srgbClr val="22282E"/>
+                </a:solidFill>
+              </a:rPr>
+              <a:t>•  Hay triage documentado de falsos positivos con su criterio.</a:t>
+            </a:r>
+          </a:p>
+          <a:p>
+            <a:pPr>
+              <a:spcAft>
+                <a:spcPts val="600"/>
+              </a:spcAft>
+            </a:pPr>
+            <a:r>
+              <a:rPr sz="1500">
+                <a:solidFill>
+                  <a:srgbClr val="22282E"/>
+                </a:solidFill>
+              </a:rPr>
+              <a:t>•  Se incluye la verificación ASVS de un conjunto de requisitos L1/L2 con evidencia de cumple/no cumple.</a:t>
+            </a:r>
+          </a:p>
+          <a:p>
+            <a:pPr>
+              <a:spcAft>
+                <a:spcPts val="600"/>
+              </a:spcAft>
+            </a:pPr>
+            <a:r>
+              <a:rPr sz="1500">
+                <a:solidFill>
+                  <a:srgbClr val="22282E"/>
+                </a:solidFill>
+              </a:rPr>
+              <a:t>•  El informe tiene resumen ejecutivo sin jerga y tabla priorizada de remediación.</a:t>
+            </a:r>
+          </a:p>
+        </p:txBody>
+      </p:sp>
+    </p:spTree>
+  </p:cSld>
+  <p:clrMapOvr>
+    <a:masterClrMapping/>
+  </p:clrMapOvr>
+</p:sld>
+</file>
+
+<file path=ppt/slides/slide13.xml><?xml version="1.0" encoding="utf-8"?>
+<p:sld xmlns:a="http://schemas.openxmlformats.org/drawingml/2006/main" xmlns:p="http://schemas.openxmlformats.org/presentationml/2006/main" xmlns:r="http://schemas.openxmlformats.org/officeDocument/2006/relationships">
+  <p:cSld>
+    <p:spTree>
+      <p:nvGrpSpPr>
+        <p:cNvPr id="1" name=""/>
+        <p:cNvGrpSpPr/>
+        <p:nvPr/>
+      </p:nvGrpSpPr>
+      <p:grpSpPr/>
+      <p:sp>
+        <p:nvSpPr>
+          <p:cNvPr id="2" name="TextBox 1"/>
+          <p:cNvSpPr txBox="1"/>
+          <p:nvPr/>
+        </p:nvSpPr>
+        <p:spPr>
+          <a:xfrm>
+            <a:off x="457200" y="320040"/>
+            <a:ext cx="8229600" cy="822960"/>
+          </a:xfrm>
+          <a:prstGeom prst="rect">
+            <a:avLst/>
+          </a:prstGeom>
+          <a:noFill/>
+        </p:spPr>
+        <p:txBody>
+          <a:bodyPr wrap="square">
+            <a:spAutoFit/>
+          </a:bodyPr>
+          <a:lstStyle/>
+          <a:p>
+            <a:r>
+              <a:rPr sz="2600" b="1">
+                <a:solidFill>
+                  <a:srgbClr val="0B3D2E"/>
+                </a:solidFill>
+              </a:rPr>
+              <a:t>⚠️ Errores comunes</a:t>
+            </a:r>
+          </a:p>
+        </p:txBody>
+      </p:sp>
+      <p:sp>
+        <p:nvSpPr>
+          <p:cNvPr id="3" name="TextBox 2"/>
+          <p:cNvSpPr txBox="1"/>
+          <p:nvPr/>
+        </p:nvSpPr>
+        <p:spPr>
+          <a:xfrm>
+            <a:off x="457200" y="1280160"/>
+            <a:ext cx="8229600" cy="4937760"/>
+          </a:xfrm>
+          <a:prstGeom prst="rect">
+            <a:avLst/>
+          </a:prstGeom>
+          <a:noFill/>
+        </p:spPr>
+        <p:txBody>
+          <a:bodyPr wrap="square">
+            <a:spAutoFit/>
+          </a:bodyPr>
+          <a:lstStyle/>
+          <a:p>
+            <a:pPr>
+              <a:spcAft>
+                <a:spcPts val="600"/>
+              </a:spcAft>
+            </a:pPr>
+            <a:r>
+              <a:rPr sz="1500">
+                <a:solidFill>
+                  <a:srgbClr val="22282E"/>
+                </a:solidFill>
+              </a:rPr>
+              <a:t>•  "SAST reporta 500 hallazgos, imposible revisarlos" — Falta triage y contexto. Filtra por severidad, agrupa por regla y descarta patrones de falso positivo.</a:t>
+            </a:r>
+          </a:p>
+          <a:p>
+            <a:pPr>
+              <a:spcAft>
+                <a:spcPts val="600"/>
+              </a:spcAft>
+            </a:pPr>
+            <a:r>
+              <a:rPr sz="1500">
+                <a:solidFill>
+                  <a:srgbClr val="22282E"/>
+                </a:solidFill>
+              </a:rPr>
+              <a:t>•  "DAST no encontró la vulnerabilidad que sé que existe" — DAST solo ve lo que alcanza. Complementa con SAST y revisión manual (cobertura).</a:t>
+            </a:r>
+          </a:p>
+          <a:p>
+            <a:pPr>
+              <a:spcAft>
+                <a:spcPts val="600"/>
+              </a:spcAft>
+            </a:pPr>
+            <a:r>
+              <a:rPr sz="1500">
+                <a:solidFill>
+                  <a:srgbClr val="22282E"/>
+                </a:solidFill>
+              </a:rPr>
+              <a:t>•  "La herramienta no vio el fallo de lógica de negocio" — Ninguna herramienta razona la lógica. Eso exige revisión manual guiada por checklist.</a:t>
+            </a:r>
+          </a:p>
+          <a:p>
+            <a:pPr>
+              <a:spcAft>
+                <a:spcPts val="600"/>
+              </a:spcAft>
+            </a:pPr>
+            <a:r>
+              <a:rPr sz="1500">
+                <a:solidFill>
+                  <a:srgbClr val="22282E"/>
+                </a:solidFill>
+              </a:rPr>
+              <a:t>•  "Corrimos las pruebas justo antes de producción" — Demasiado tarde. Integra SAST/SCA en el pipeline (shift-left) para corregir barato.</a:t>
+            </a:r>
+          </a:p>
+          <a:p>
+            <a:pPr>
+              <a:spcAft>
+                <a:spcPts val="600"/>
+              </a:spcAft>
+            </a:pPr>
+            <a:r>
+              <a:rPr sz="1500">
+                <a:solidFill>
+                  <a:srgbClr val="22282E"/>
+                </a:solidFill>
+              </a:rPr>
+              <a:t>•  "Reportamos hallazgos pero nadie los arregla" — Sin dueño ni SLA no hay remediación. Asigna responsable y plazo por severidad.</a:t>
+            </a:r>
+          </a:p>
+          <a:p>
+            <a:pPr>
+              <a:spcAft>
+                <a:spcPts val="600"/>
+              </a:spcAft>
+            </a:pPr>
+            <a:r>
+              <a:rPr sz="1500">
+                <a:solidFill>
+                  <a:srgbClr val="22282E"/>
+                </a:solidFill>
+              </a:rPr>
+              <a:t>•  "Probamos una app de un tercero sin permiso" — Es ilegal. Toda prueba requiere autorización por escrito y entorno autorizado.</a:t>
+            </a:r>
+          </a:p>
+        </p:txBody>
+      </p:sp>
+    </p:spTree>
+  </p:cSld>
+  <p:clrMapOvr>
+    <a:masterClrMapping/>
+  </p:clrMapOvr>
+</p:sld>
+</file>
+
+<file path=ppt/slides/slide14.xml><?xml version="1.0" encoding="utf-8"?>
+<p:sld xmlns:a="http://schemas.openxmlformats.org/drawingml/2006/main" xmlns:p="http://schemas.openxmlformats.org/presentationml/2006/main" xmlns:r="http://schemas.openxmlformats.org/officeDocument/2006/relationships">
+  <p:cSld>
+    <p:spTree>
+      <p:nvGrpSpPr>
+        <p:cNvPr id="1" name=""/>
+        <p:cNvGrpSpPr/>
+        <p:nvPr/>
+      </p:nvGrpSpPr>
+      <p:grpSpPr/>
+      <p:sp>
+        <p:nvSpPr>
+          <p:cNvPr id="2" name="TextBox 1"/>
+          <p:cNvSpPr txBox="1"/>
+          <p:nvPr/>
+        </p:nvSpPr>
+        <p:spPr>
+          <a:xfrm>
+            <a:off x="457200" y="320040"/>
+            <a:ext cx="8229600" cy="822960"/>
+          </a:xfrm>
+          <a:prstGeom prst="rect">
+            <a:avLst/>
+          </a:prstGeom>
+          <a:noFill/>
+        </p:spPr>
+        <p:txBody>
+          <a:bodyPr wrap="square">
+            <a:spAutoFit/>
+          </a:bodyPr>
+          <a:lstStyle/>
+          <a:p>
+            <a:r>
+              <a:rPr sz="2600" b="1">
+                <a:solidFill>
+                  <a:srgbClr val="0B3D2E"/>
+                </a:solidFill>
+              </a:rPr>
+              <a:t>❓ Preguntas frecuentes</a:t>
+            </a:r>
+          </a:p>
+        </p:txBody>
+      </p:sp>
+      <p:sp>
+        <p:nvSpPr>
+          <p:cNvPr id="3" name="TextBox 2"/>
+          <p:cNvSpPr txBox="1"/>
+          <p:nvPr/>
+        </p:nvSpPr>
+        <p:spPr>
+          <a:xfrm>
+            <a:off x="457200" y="1280160"/>
+            <a:ext cx="8229600" cy="4937760"/>
+          </a:xfrm>
+          <a:prstGeom prst="rect">
+            <a:avLst/>
+          </a:prstGeom>
+          <a:noFill/>
+        </p:spPr>
+        <p:txBody>
+          <a:bodyPr wrap="square">
+            <a:spAutoFit/>
+          </a:bodyPr>
+          <a:lstStyle/>
+          <a:p>
+            <a:pPr>
+              <a:spcAft>
+                <a:spcPts val="600"/>
+              </a:spcAft>
+            </a:pPr>
+            <a:r>
+              <a:rPr sz="1500">
+                <a:solidFill>
+                  <a:srgbClr val="22282E"/>
+                </a:solidFill>
+              </a:rPr>
+              <a:t>•  ❓ ¿SAST o DAST, cuál elijo?</a:t>
+            </a:r>
+          </a:p>
+          <a:p>
+            <a:pPr>
+              <a:spcAft>
+                <a:spcPts val="600"/>
+              </a:spcAft>
+            </a:pPr>
+            <a:r>
+              <a:rPr sz="1500">
+                <a:solidFill>
+                  <a:srgbClr val="22282E"/>
+                </a:solidFill>
+              </a:rPr>
+              <a:t>•  Ambos: son complementarios. SAST ve el código temprano con muchos falsos positivos; DAST prueba la app viva con menos ruido pero cobertura limitada. Añade SCA para dependencias y revisión manual para…</a:t>
+            </a:r>
+          </a:p>
+          <a:p>
+            <a:pPr>
+              <a:spcAft>
+                <a:spcPts val="600"/>
+              </a:spcAft>
+            </a:pPr>
+            <a:r>
+              <a:rPr sz="1500">
+                <a:solidFill>
+                  <a:srgbClr val="22282E"/>
+                </a:solidFill>
+              </a:rPr>
+              <a:t>•  ❓ ¿Qué nivel de ASVS debo apuntar?</a:t>
+            </a:r>
+          </a:p>
+          <a:p>
+            <a:pPr>
+              <a:spcAft>
+                <a:spcPts val="600"/>
+              </a:spcAft>
+            </a:pPr>
+            <a:r>
+              <a:rPr sz="1500">
+                <a:solidFill>
+                  <a:srgbClr val="22282E"/>
+                </a:solidFill>
+              </a:rPr>
+              <a:t>•  L1 es una línea base para cualquier app; L2 es el objetivo típico de aplicaciones que manejan datos sensibles; L3 se reserva para sistemas de alto valor/vida crítica. Elige según el riesgo del activo.</a:t>
+            </a:r>
+          </a:p>
+          <a:p>
+            <a:pPr>
+              <a:spcAft>
+                <a:spcPts val="600"/>
+              </a:spcAft>
+            </a:pPr>
+            <a:r>
+              <a:rPr sz="1500">
+                <a:solidFill>
+                  <a:srgbClr val="22282E"/>
+                </a:solidFill>
+              </a:rPr>
+              <a:t>•  ❓ ¿La revisión manual sigue siendo necesaria con tantas herramientas?</a:t>
+            </a:r>
+          </a:p>
+          <a:p>
+            <a:pPr>
+              <a:spcAft>
+                <a:spcPts val="600"/>
+              </a:spcAft>
+            </a:pPr>
+            <a:r>
+              <a:rPr sz="1500">
+                <a:solidFill>
+                  <a:srgbClr val="22282E"/>
+                </a:solidFill>
+              </a:rPr>
+              <a:t>•  Sí. Las herramientas escalan la búsqueda de patrones conocidos, pero los fallos de lógica de negocio, control de acceso y flujos de autorización casi siempre requieren un revisor humano.</a:t>
+            </a:r>
+          </a:p>
+          <a:p>
+            <a:pPr>
+              <a:spcAft>
+                <a:spcPts val="600"/>
+              </a:spcAft>
+            </a:pPr>
+            <a:r>
+              <a:rPr sz="1500">
+                <a:solidFill>
+                  <a:srgbClr val="22282E"/>
+                </a:solidFill>
+              </a:rPr>
+              <a:t>•  ❓ ¿Cómo priorizo qué remediar primero?</a:t>
+            </a:r>
+          </a:p>
+        </p:txBody>
+      </p:sp>
+    </p:spTree>
+  </p:cSld>
+  <p:clrMapOvr>
+    <a:masterClrMapping/>
+  </p:clrMapOvr>
+</p:sld>
+</file>
+
+<file path=ppt/slides/slide15.xml><?xml version="1.0" encoding="utf-8"?>
+<p:sld xmlns:a="http://schemas.openxmlformats.org/drawingml/2006/main" xmlns:p="http://schemas.openxmlformats.org/presentationml/2006/main" xmlns:r="http://schemas.openxmlformats.org/officeDocument/2006/relationships">
+  <p:cSld>
+    <p:spTree>
+      <p:nvGrpSpPr>
+        <p:cNvPr id="1" name=""/>
+        <p:cNvGrpSpPr/>
+        <p:nvPr/>
+      </p:nvGrpSpPr>
+      <p:grpSpPr/>
+      <p:sp>
+        <p:nvSpPr>
+          <p:cNvPr id="2" name="TextBox 1"/>
+          <p:cNvSpPr txBox="1"/>
+          <p:nvPr/>
+        </p:nvSpPr>
+        <p:spPr>
+          <a:xfrm>
+            <a:off x="457200" y="320040"/>
+            <a:ext cx="8229600" cy="822960"/>
+          </a:xfrm>
+          <a:prstGeom prst="rect">
+            <a:avLst/>
+          </a:prstGeom>
+          <a:noFill/>
+        </p:spPr>
+        <p:txBody>
+          <a:bodyPr wrap="square">
+            <a:spAutoFit/>
+          </a:bodyPr>
+          <a:lstStyle/>
+          <a:p>
+            <a:r>
+              <a:rPr sz="2600" b="1">
+                <a:solidFill>
+                  <a:srgbClr val="0B3D2E"/>
+                </a:solidFill>
+              </a:rPr>
+              <a:t>🔗 Referencias</a:t>
+            </a:r>
+          </a:p>
+        </p:txBody>
+      </p:sp>
+      <p:sp>
+        <p:nvSpPr>
+          <p:cNvPr id="3" name="TextBox 2"/>
+          <p:cNvSpPr txBox="1"/>
+          <p:nvPr/>
+        </p:nvSpPr>
+        <p:spPr>
+          <a:xfrm>
+            <a:off x="457200" y="1280160"/>
+            <a:ext cx="8229600" cy="4937760"/>
+          </a:xfrm>
+          <a:prstGeom prst="rect">
+            <a:avLst/>
+          </a:prstGeom>
+          <a:noFill/>
+        </p:spPr>
+        <p:txBody>
+          <a:bodyPr wrap="square">
+            <a:spAutoFit/>
+          </a:bodyPr>
+          <a:lstStyle/>
+          <a:p>
+            <a:pPr>
+              <a:spcAft>
+                <a:spcPts val="600"/>
+              </a:spcAft>
+            </a:pPr>
+            <a:r>
+              <a:rPr sz="1500">
+                <a:solidFill>
+                  <a:srgbClr val="22282E"/>
+                </a:solidFill>
+              </a:rPr>
               <a:t>•  Chapple, Stewart &amp; Gibson. (ISC)² CISSP Official Study Guide, 9.ª ed., Sybex — Security Assessment &amp; Testing y Software Development Security.</a:t>
             </a:r>
           </a:p>
@@ -3644,6 +4170,81 @@
           </a:p>
         </p:txBody>
       </p:sp>
+    </p:spTree>
+  </p:cSld>
+  <p:clrMapOvr>
+    <a:masterClrMapping/>
+  </p:clrMapOvr>
+</p:sld>
+</file>
+
+<file path=ppt/slides/slide16.xml><?xml version="1.0" encoding="utf-8"?>
+<p:sld xmlns:a="http://schemas.openxmlformats.org/drawingml/2006/main" xmlns:p="http://schemas.openxmlformats.org/presentationml/2006/main" xmlns:r="http://schemas.openxmlformats.org/officeDocument/2006/relationships">
+  <p:cSld>
+    <p:spTree>
+      <p:nvGrpSpPr>
+        <p:cNvPr id="1" name=""/>
+        <p:cNvGrpSpPr/>
+        <p:nvPr/>
+      </p:nvGrpSpPr>
+      <p:grpSpPr/>
+      <p:sp>
+        <p:nvSpPr>
+          <p:cNvPr id="2" name="TextBox 1"/>
+          <p:cNvSpPr txBox="1"/>
+          <p:nvPr/>
+        </p:nvSpPr>
+        <p:spPr>
+          <a:xfrm>
+            <a:off x="457200" y="274320"/>
+            <a:ext cx="8229600" cy="640080"/>
+          </a:xfrm>
+          <a:prstGeom prst="rect">
+            <a:avLst/>
+          </a:prstGeom>
+          <a:noFill/>
+        </p:spPr>
+        <p:txBody>
+          <a:bodyPr wrap="square">
+            <a:spAutoFit/>
+          </a:bodyPr>
+          <a:lstStyle/>
+          <a:p>
+            <a:r>
+              <a:rPr sz="2200" b="1">
+                <a:solidFill>
+                  <a:srgbClr val="0B3D2E"/>
+                </a:solidFill>
+              </a:rPr>
+              <a:t>Diagrama de la clase</a:t>
+            </a:r>
+          </a:p>
+        </p:txBody>
+      </p:sp>
+      <p:pic>
+        <p:nvPicPr>
+          <p:cNvPr id="3" name="Picture 2" descr="7ce38c974280b875.png"/>
+          <p:cNvPicPr>
+            <a:picLocks noChangeAspect="1"/>
+          </p:cNvPicPr>
+          <p:nvPr/>
+        </p:nvPicPr>
+        <p:blipFill>
+          <a:blip r:embed="rId2"/>
+          <a:stretch>
+            <a:fillRect/>
+          </a:stretch>
+        </p:blipFill>
+        <p:spPr>
+          <a:xfrm>
+            <a:off x="457200" y="3296153"/>
+            <a:ext cx="8229600" cy="905773"/>
+          </a:xfrm>
+          <a:prstGeom prst="rect">
+            <a:avLst/>
+          </a:prstGeom>
+        </p:spPr>
+      </p:pic>
     </p:spTree>
   </p:cSld>
   <p:clrMapOvr>
@@ -3728,7 +4329,7 @@
                   <a:srgbClr val="22282E"/>
                 </a:solidFill>
               </a:rPr>
-              <a:t>•  Verificar que el software es seguro antes y después de desplegarlo. Esta clase cubre las pruebas de seguridad del software desde la óptica de evaluación de CISSP: revisión de código seguro (manual y asistida), las técnicas automatizadas SAST/DAST/IAST/SCA, las pruebas de penetración de aplicaciones (encuadre defensivo y de evaluación), la gestión de hallazgos con severidad y SLA, y la verificación contra OWASP ASVS como estándar de requisitos. El enfoque es de evaluación y aseguramiento: encontrar y gestionar defectos, no explotarlos en producción.</a:t>
+              <a:t>•  Verificar que el software es seguro antes y después de desplegarlo. Esta clase cubre las pruebas de seguridad del software desde la óptica de evaluación de CISSP: revisión de código seguro (manual y…</a:t>
             </a:r>
           </a:p>
         </p:txBody>
@@ -4122,7 +4723,7 @@
                   <a:srgbClr val="0B3D2E"/>
                 </a:solidFill>
               </a:rPr>
-              <a:t>📖 Definiciones y características</a:t>
+              <a:t>🧠 Modelo mental y caso de decisión</a:t>
             </a:r>
           </a:p>
         </p:txBody>
@@ -4160,97 +4761,22 @@
                   <a:srgbClr val="22282E"/>
                 </a:solidFill>
               </a:rPr>
-              <a:t>•  SAST (Static Application Security Testing): analiza el código fuente/binario sin ejecutarlo. Característica clave: cobertura temprana y amplia, pero muchos falsos positivos; no ve fallos de configuración en runtime.</a:t>
-            </a:r>
-          </a:p>
-          <a:p>
-            <a:pPr>
-              <a:spcAft>
-                <a:spcPts val="600"/>
-              </a:spcAft>
-            </a:pPr>
-            <a:r>
-              <a:rPr sz="1500">
-                <a:solidFill>
-                  <a:srgbClr val="22282E"/>
-                </a:solidFill>
-              </a:rPr>
-              <a:t>•  DAST (Dynamic Application Security Testing): prueba la aplicación en ejecución desde fuera, sin ver el código. Característica clave: baja tasa de falsos positivos en lo que encuentra, pero cobertura limitada a lo que alcanza; se ejecuta tarde en el ciclo.</a:t>
-            </a:r>
-          </a:p>
-          <a:p>
-            <a:pPr>
-              <a:spcAft>
-                <a:spcPts val="600"/>
-              </a:spcAft>
-            </a:pPr>
-            <a:r>
-              <a:rPr sz="1500">
-                <a:solidFill>
-                  <a:srgbClr val="22282E"/>
-                </a:solidFill>
-              </a:rPr>
-              <a:t>•  IAST (Interactive AST): instrumenta la aplicación y observa su comportamiento durante las pruebas funcionales. Característica clave: combina visibilidad de código y runtime, reduciendo falsos positivos.</a:t>
-            </a:r>
-          </a:p>
-          <a:p>
-            <a:pPr>
-              <a:spcAft>
-                <a:spcPts val="600"/>
-              </a:spcAft>
-            </a:pPr>
-            <a:r>
-              <a:rPr sz="1500">
-                <a:solidFill>
-                  <a:srgbClr val="22282E"/>
-                </a:solidFill>
-              </a:rPr>
-              <a:t>•  SCA (Software Composition Analysis): identifica dependencias y librerías vulnerables y sus licencias. Característica clave: cubre el riesgo de terceros (la mayor parte del código moderno), p. ej. CVE en paquetes.</a:t>
-            </a:r>
-          </a:p>
-          <a:p>
-            <a:pPr>
-              <a:spcAft>
-                <a:spcPts val="600"/>
-              </a:spcAft>
-            </a:pPr>
-            <a:r>
-              <a:rPr sz="1500">
-                <a:solidFill>
-                  <a:srgbClr val="22282E"/>
-                </a:solidFill>
-              </a:rPr>
-              <a:t>•  Revisión de código seguro (secure code review): inspección manual, guiada por checklist, de zonas sensibles (autenticación, validación de entrada, criptografía, manejo de errores). Característica clave: detecta fallos de lógica de negocio que ninguna herramienta automatiza.</a:t>
-            </a:r>
-          </a:p>
-          <a:p>
-            <a:pPr>
-              <a:spcAft>
-                <a:spcPts val="600"/>
-              </a:spcAft>
-            </a:pPr>
-            <a:r>
-              <a:rPr sz="1500">
-                <a:solidFill>
-                  <a:srgbClr val="22282E"/>
-                </a:solidFill>
-              </a:rPr>
-              <a:t>•  Prueba de penetración de aplicación: evaluación autorizada que valida la explotabilidad real de los hallazgos. Característica clave: se realiza con alcance y reglas de enfrentamiento por escrito, en entorno autorizado.</a:t>
-            </a:r>
-          </a:p>
-          <a:p>
-            <a:pPr>
-              <a:spcAft>
-                <a:spcPts val="600"/>
-              </a:spcAft>
-            </a:pPr>
-            <a:r>
-              <a:rPr sz="1500">
-                <a:solidFill>
-                  <a:srgbClr val="22282E"/>
-                </a:solidFill>
-              </a:rPr>
-              <a:t>•  Positivo/negativo, verdadero/falso: un falso positivo es una alerta sin defecto real; un falso negativo es un defecto no detectado. Característica clave: el triage busca minimizar falsos negativos sin ahogarse en falsos positivos.</a:t>
+              <a:t>•  La estrategia combina revisión, SAST, DAST, composición y pruebas manuales según propiedad y fase.</a:t>
+            </a:r>
+          </a:p>
+          <a:p>
+            <a:pPr>
+              <a:spcAft>
+                <a:spcPts val="600"/>
+              </a:spcAft>
+            </a:pPr>
+            <a:r>
+              <a:rPr sz="1500">
+                <a:solidFill>
+                  <a:srgbClr val="22282E"/>
+                </a:solidFill>
+              </a:rPr>
+              <a:t>•  Caso razonado. DAST no alcanza un rol; la cobertura inválida el resultado verde y se corrige autenticación.</a:t>
             </a:r>
           </a:p>
         </p:txBody>
@@ -4301,7 +4827,7 @@
                   <a:srgbClr val="0B3D2E"/>
                 </a:solidFill>
               </a:rPr>
-              <a:t>🧰 Herramientas y preparación</a:t>
+              <a:t>📔 Glosario operativo complementario</a:t>
             </a:r>
           </a:p>
         </p:txBody>
@@ -4339,82 +4865,52 @@
                   <a:srgbClr val="22282E"/>
                 </a:solidFill>
               </a:rPr>
-              <a:t>•  Entorno de laboratorio propio con una aplicación deliberadamente vulnerable de práctica:</a:t>
-            </a:r>
-          </a:p>
-          <a:p>
-            <a:pPr>
-              <a:spcAft>
-                <a:spcPts val="600"/>
-              </a:spcAft>
-            </a:pPr>
-            <a:r>
-              <a:rPr sz="1500">
-                <a:solidFill>
-                  <a:srgbClr val="22282E"/>
-                </a:solidFill>
-              </a:rPr>
-              <a:t>•  App de práctica intencionalmente insegura (p. ej. OWASP Juice Shop o WebGoat) desplegada solo en local/laboratorio.</a:t>
-            </a:r>
-          </a:p>
-          <a:p>
-            <a:pPr>
-              <a:spcAft>
-                <a:spcPts val="600"/>
-              </a:spcAft>
-            </a:pPr>
-            <a:r>
-              <a:rPr sz="1500">
-                <a:solidFill>
-                  <a:srgbClr val="22282E"/>
-                </a:solidFill>
-              </a:rPr>
-              <a:t>•  SAST: Semgrep o SonarQube sobre el código de la app de práctica.</a:t>
-            </a:r>
-          </a:p>
-          <a:p>
-            <a:pPr>
-              <a:spcAft>
-                <a:spcPts val="600"/>
-              </a:spcAft>
-            </a:pPr>
-            <a:r>
-              <a:rPr sz="1500">
-                <a:solidFill>
-                  <a:srgbClr val="22282E"/>
-                </a:solidFill>
-              </a:rPr>
-              <a:t>•  DAST: OWASP ZAP en modo pasivo/activo contra la app de laboratorio.</a:t>
-            </a:r>
-          </a:p>
-          <a:p>
-            <a:pPr>
-              <a:spcAft>
-                <a:spcPts val="600"/>
-              </a:spcAft>
-            </a:pPr>
-            <a:r>
-              <a:rPr sz="1500">
-                <a:solidFill>
-                  <a:srgbClr val="22282E"/>
-                </a:solidFill>
-              </a:rPr>
-              <a:t>•  SCA: OWASP Dependency-Check o npm audit/pip-audit según el stack.</a:t>
-            </a:r>
-          </a:p>
-          <a:p>
-            <a:pPr>
-              <a:spcAft>
-                <a:spcPts val="600"/>
-              </a:spcAft>
-            </a:pPr>
-            <a:r>
-              <a:rPr sz="1500">
-                <a:solidFill>
-                  <a:srgbClr val="22282E"/>
-                </a:solidFill>
-              </a:rPr>
-              <a:t>•  Checklist ASVS (OWASP) y una hoja de cálculo de gestión de hallazgos (ID, título, severidad, CWE, estado, SLA).</a:t>
+              <a:t>•  Término — Definición</a:t>
+            </a:r>
+          </a:p>
+          <a:p>
+            <a:pPr>
+              <a:spcAft>
+                <a:spcPts val="600"/>
+              </a:spcAft>
+            </a:pPr>
+            <a:r>
+              <a:rPr sz="1500">
+                <a:solidFill>
+                  <a:srgbClr val="22282E"/>
+                </a:solidFill>
+              </a:rPr>
+              <a:t>•  Evidencia — Información cuya procedencia y relación con un criterio pueden revisarse.</a:t>
+            </a:r>
+          </a:p>
+          <a:p>
+            <a:pPr>
+              <a:spcAft>
+                <a:spcPts val="600"/>
+              </a:spcAft>
+            </a:pPr>
+            <a:r>
+              <a:rPr sz="1500">
+                <a:solidFill>
+                  <a:srgbClr val="22282E"/>
+                </a:solidFill>
+              </a:rPr>
+              <a:t>•  Supuesto — Condición declarada de la que depende una conclusión.</a:t>
+            </a:r>
+          </a:p>
+          <a:p>
+            <a:pPr>
+              <a:spcAft>
+                <a:spcPts val="600"/>
+              </a:spcAft>
+            </a:pPr>
+            <a:r>
+              <a:rPr sz="1500">
+                <a:solidFill>
+                  <a:srgbClr val="22282E"/>
+                </a:solidFill>
+              </a:rPr>
+              <a:t>•  Riesgo residual — Exposición que permanece después del tratamiento.</a:t>
             </a:r>
           </a:p>
         </p:txBody>
@@ -4465,7 +4961,7 @@
                   <a:srgbClr val="0B3D2E"/>
                 </a:solidFill>
               </a:rPr>
-              <a:t>🧪 Laboratorio guiado — Revisión de código y evaluación de una app de práctica</a:t>
+              <a:t>✅ Criterio de dominio</a:t>
             </a:r>
           </a:p>
         </p:txBody>
@@ -4503,97 +4999,7 @@
                   <a:srgbClr val="22282E"/>
                 </a:solidFill>
               </a:rPr>
-              <a:t>•  Ejercicio aplicado: evalúas una aplicación vulnerable de laboratorio combinando revisión manual y herramientas, y gestionas los hallazgos.</a:t>
-            </a:r>
-          </a:p>
-          <a:p>
-            <a:pPr>
-              <a:spcAft>
-                <a:spcPts val="600"/>
-              </a:spcAft>
-            </a:pPr>
-            <a:r>
-              <a:rPr sz="1500">
-                <a:solidFill>
-                  <a:srgbClr val="22282E"/>
-                </a:solidFill>
-              </a:rPr>
-              <a:t>•  Prepara el entorno. Despliega la app de práctica en una VM/contenedor aislado sin acceso a producción. Confirma el alcance por escrito: qué se prueba y qué queda fuera.</a:t>
-            </a:r>
-          </a:p>
-          <a:p>
-            <a:pPr>
-              <a:spcAft>
-                <a:spcPts val="600"/>
-              </a:spcAft>
-            </a:pPr>
-            <a:r>
-              <a:rPr sz="1500">
-                <a:solidFill>
-                  <a:srgbClr val="22282E"/>
-                </a:solidFill>
-              </a:rPr>
-              <a:t>•  Pasa SCA. Ejecuta el análisis de dependencias y anota las librerías con CVE conocidos y su severidad. Es el hallazgo más rápido y frecuente.</a:t>
-            </a:r>
-          </a:p>
-          <a:p>
-            <a:pPr>
-              <a:spcAft>
-                <a:spcPts val="600"/>
-              </a:spcAft>
-            </a:pPr>
-            <a:r>
-              <a:rPr sz="1500">
-                <a:solidFill>
-                  <a:srgbClr val="22282E"/>
-                </a:solidFill>
-              </a:rPr>
-              <a:t>•  Ejecuta SAST. Corre Semgrep/SonarQube sobre el código. Exporta los hallazgos con su CWE y descarta ruido evidente (marcando el criterio del triage).</a:t>
-            </a:r>
-          </a:p>
-          <a:p>
-            <a:pPr>
-              <a:spcAft>
-                <a:spcPts val="600"/>
-              </a:spcAft>
-            </a:pPr>
-            <a:r>
-              <a:rPr sz="1500">
-                <a:solidFill>
-                  <a:srgbClr val="22282E"/>
-                </a:solidFill>
-              </a:rPr>
-              <a:t>•  Haz la revisión de código guiada. Con checklist ASVS, revisa manualmente cuatro zonas: autenticación/sesión, validación de entrada, criptografía/almacenamiento de secretos y manejo de errores/logging. Documenta hallazgos de lógica que SAST no vio.</a:t>
-            </a:r>
-          </a:p>
-          <a:p>
-            <a:pPr>
-              <a:spcAft>
-                <a:spcPts val="600"/>
-              </a:spcAft>
-            </a:pPr>
-            <a:r>
-              <a:rPr sz="1500">
-                <a:solidFill>
-                  <a:srgbClr val="22282E"/>
-                </a:solidFill>
-              </a:rPr>
-              <a:t>•  Ejecuta DAST. Lanza ZAP contra la app en ejecución (escaneo pasivo y luego activo autorizado). Correlaciona sus hallazgos con los de SAST para confirmar explotabilidad.</a:t>
-            </a:r>
-          </a:p>
-          <a:p>
-            <a:pPr>
-              <a:spcAft>
-                <a:spcPts val="600"/>
-              </a:spcAft>
-            </a:pPr>
-            <a:r>
-              <a:rPr sz="1500">
-                <a:solidFill>
-                  <a:srgbClr val="22282E"/>
-                </a:solidFill>
-              </a:rPr>
-              <a:t>•  Consolida y deduplica. Une los hallazgos de SCA+SAST+DAST+revisión en un único registro. Marca duplicados y clasifica cada uno con severidad (CVSS/riesgo) y CWE.</a:t>
+              <a:t>•  El alumno demuestra dominio cuando explica el diagrama, resuelve el caso con evidencia, declara límites y puede defender por qué su decisión cambia si cambia un supuesto.</a:t>
             </a:r>
           </a:p>
         </p:txBody>
@@ -4644,7 +5050,7 @@
                   <a:srgbClr val="0B3D2E"/>
                 </a:solidFill>
               </a:rPr>
-              <a:t>✍️ Ejercicios</a:t>
+              <a:t>📖 Definiciones y características</a:t>
             </a:r>
           </a:p>
         </p:txBody>
@@ -4682,82 +5088,97 @@
                   <a:srgbClr val="22282E"/>
                 </a:solidFill>
               </a:rPr>
-              <a:t>•  Sitúa SAST, DAST, IAST y SCA en una línea del SDLC y explica el mejor momento de cada uno.</a:t>
-            </a:r>
-          </a:p>
-          <a:p>
-            <a:pPr>
-              <a:spcAft>
-                <a:spcPts val="600"/>
-              </a:spcAft>
-            </a:pPr>
-            <a:r>
-              <a:rPr sz="1500">
-                <a:solidFill>
-                  <a:srgbClr val="22282E"/>
-                </a:solidFill>
-              </a:rPr>
-              <a:t>•  Revisa un fragmento de código dado y encuentra dos fallos de validación de entrada, citando el CWE.</a:t>
-            </a:r>
-          </a:p>
-          <a:p>
-            <a:pPr>
-              <a:spcAft>
-                <a:spcPts val="600"/>
-              </a:spcAft>
-            </a:pPr>
-            <a:r>
-              <a:rPr sz="1500">
-                <a:solidFill>
-                  <a:srgbClr val="22282E"/>
-                </a:solidFill>
-              </a:rPr>
-              <a:t>•  Triage de diez hallazgos de SAST: marca falsos positivos con justificación.</a:t>
-            </a:r>
-          </a:p>
-          <a:p>
-            <a:pPr>
-              <a:spcAft>
-                <a:spcPts val="600"/>
-              </a:spcAft>
-            </a:pPr>
-            <a:r>
-              <a:rPr sz="1500">
-                <a:solidFill>
-                  <a:srgbClr val="22282E"/>
-                </a:solidFill>
-              </a:rPr>
-              <a:t>•  Mapea cinco hallazgos a requisitos ASVS y determina el nivel (L1/L2/L3) que incumplen.</a:t>
-            </a:r>
-          </a:p>
-          <a:p>
-            <a:pPr>
-              <a:spcAft>
-                <a:spcPts val="600"/>
-              </a:spcAft>
-            </a:pPr>
-            <a:r>
-              <a:rPr sz="1500">
-                <a:solidFill>
-                  <a:srgbClr val="22282E"/>
-                </a:solidFill>
-              </a:rPr>
-              <a:t>•  Define una política de SLA de remediación por severidad y justifícala con el riesgo.</a:t>
-            </a:r>
-          </a:p>
-          <a:p>
-            <a:pPr>
-              <a:spcAft>
-                <a:spcPts val="600"/>
-              </a:spcAft>
-            </a:pPr>
-            <a:r>
-              <a:rPr sz="1500">
-                <a:solidFill>
-                  <a:srgbClr val="22282E"/>
-                </a:solidFill>
-              </a:rPr>
-              <a:t>•  Correlaciona un hallazgo de SAST con uno de DAST para demostrar explotabilidad real.</a:t>
+              <a:t>•  SAST (Static Application Security Testing): analiza el código fuente/binario sin ejecutarlo. Característica clave: cobertura temprana y amplia, pero muchos falsos positivos; no ve fallos de…</a:t>
+            </a:r>
+          </a:p>
+          <a:p>
+            <a:pPr>
+              <a:spcAft>
+                <a:spcPts val="600"/>
+              </a:spcAft>
+            </a:pPr>
+            <a:r>
+              <a:rPr sz="1500">
+                <a:solidFill>
+                  <a:srgbClr val="22282E"/>
+                </a:solidFill>
+              </a:rPr>
+              <a:t>•  DAST (Dynamic Application Security Testing): prueba la aplicación en ejecución desde fuera, sin ver el código. Característica clave: baja tasa de falsos positivos en lo que encuentra, pero cobertura…</a:t>
+            </a:r>
+          </a:p>
+          <a:p>
+            <a:pPr>
+              <a:spcAft>
+                <a:spcPts val="600"/>
+              </a:spcAft>
+            </a:pPr>
+            <a:r>
+              <a:rPr sz="1500">
+                <a:solidFill>
+                  <a:srgbClr val="22282E"/>
+                </a:solidFill>
+              </a:rPr>
+              <a:t>•  IAST (Interactive AST): instrumenta la aplicación y observa su comportamiento durante las pruebas funcionales. Característica clave: combina visibilidad de código y runtime, reduciendo falsos…</a:t>
+            </a:r>
+          </a:p>
+          <a:p>
+            <a:pPr>
+              <a:spcAft>
+                <a:spcPts val="600"/>
+              </a:spcAft>
+            </a:pPr>
+            <a:r>
+              <a:rPr sz="1500">
+                <a:solidFill>
+                  <a:srgbClr val="22282E"/>
+                </a:solidFill>
+              </a:rPr>
+              <a:t>•  SCA (Software Composition Analysis): identifica dependencias y librerías vulnerables y sus licencias. Característica clave: cubre el riesgo de terceros (la mayor parte del código moderno), p. ej. CVE…</a:t>
+            </a:r>
+          </a:p>
+          <a:p>
+            <a:pPr>
+              <a:spcAft>
+                <a:spcPts val="600"/>
+              </a:spcAft>
+            </a:pPr>
+            <a:r>
+              <a:rPr sz="1500">
+                <a:solidFill>
+                  <a:srgbClr val="22282E"/>
+                </a:solidFill>
+              </a:rPr>
+              <a:t>•  Revisión de código seguro (secure code review): inspección manual, guiada por checklist, de zonas sensibles (autenticación, validación de entrada, criptografía, manejo de errores). Característica…</a:t>
+            </a:r>
+          </a:p>
+          <a:p>
+            <a:pPr>
+              <a:spcAft>
+                <a:spcPts val="600"/>
+              </a:spcAft>
+            </a:pPr>
+            <a:r>
+              <a:rPr sz="1500">
+                <a:solidFill>
+                  <a:srgbClr val="22282E"/>
+                </a:solidFill>
+              </a:rPr>
+              <a:t>•  Prueba de penetración de aplicación: evaluación autorizada que valida la explotabilidad real de los hallazgos. Característica clave: se realiza con alcance y reglas de enfrentamiento por escrito, en…</a:t>
+            </a:r>
+          </a:p>
+          <a:p>
+            <a:pPr>
+              <a:spcAft>
+                <a:spcPts val="600"/>
+              </a:spcAft>
+            </a:pPr>
+            <a:r>
+              <a:rPr sz="1500">
+                <a:solidFill>
+                  <a:srgbClr val="22282E"/>
+                </a:solidFill>
+              </a:rPr>
+              <a:t>•  Positivo/negativo, verdadero/falso: un falso positivo es una alerta sin defecto real; un falso negativo es un defecto no detectado. Característica clave: el triage busca minimizar falsos negativos…</a:t>
             </a:r>
           </a:p>
         </p:txBody>
@@ -4808,7 +5229,7 @@
                   <a:srgbClr val="0B3D2E"/>
                 </a:solidFill>
               </a:rPr>
-              <a:t>📝 Reto verificable</a:t>
+              <a:t>🧰 Herramientas y preparación</a:t>
             </a:r>
           </a:p>
         </p:txBody>
@@ -4846,97 +5267,82 @@
                   <a:srgbClr val="22282E"/>
                 </a:solidFill>
               </a:rPr>
-              <a:t>•  Reto: entrega el informe de evaluación de seguridad de la app de práctica, con hallazgos gestionados y verificación ASVS.</a:t>
-            </a:r>
-          </a:p>
-          <a:p>
-            <a:pPr>
-              <a:spcAft>
-                <a:spcPts val="600"/>
-              </a:spcAft>
-            </a:pPr>
-            <a:r>
-              <a:rPr sz="1500">
-                <a:solidFill>
-                  <a:srgbClr val="22282E"/>
-                </a:solidFill>
-              </a:rPr>
-              <a:t>•  Criterio de aceptación:</a:t>
-            </a:r>
-          </a:p>
-          <a:p>
-            <a:pPr>
-              <a:spcAft>
-                <a:spcPts val="600"/>
-              </a:spcAft>
-            </a:pPr>
-            <a:r>
-              <a:rPr sz="1500">
-                <a:solidFill>
-                  <a:srgbClr val="22282E"/>
-                </a:solidFill>
-              </a:rPr>
-              <a:t>•  Se combinaron al menos tres técnicas (SCA, SAST, DAST y/o revisión manual) sobre software propio/autorizado en entorno aislado.</a:t>
-            </a:r>
-          </a:p>
-          <a:p>
-            <a:pPr>
-              <a:spcAft>
-                <a:spcPts val="600"/>
-              </a:spcAft>
-            </a:pPr>
-            <a:r>
-              <a:rPr sz="1500">
-                <a:solidFill>
-                  <a:srgbClr val="22282E"/>
-                </a:solidFill>
-              </a:rPr>
-              <a:t>•  El registro de hallazgos está deduplicado, con severidad, CWE, dueño y SLA por hallazgo.</a:t>
-            </a:r>
-          </a:p>
-          <a:p>
-            <a:pPr>
-              <a:spcAft>
-                <a:spcPts val="600"/>
-              </a:spcAft>
-            </a:pPr>
-            <a:r>
-              <a:rPr sz="1500">
-                <a:solidFill>
-                  <a:srgbClr val="22282E"/>
-                </a:solidFill>
-              </a:rPr>
-              <a:t>•  Hay triage documentado de falsos positivos con su criterio.</a:t>
-            </a:r>
-          </a:p>
-          <a:p>
-            <a:pPr>
-              <a:spcAft>
-                <a:spcPts val="600"/>
-              </a:spcAft>
-            </a:pPr>
-            <a:r>
-              <a:rPr sz="1500">
-                <a:solidFill>
-                  <a:srgbClr val="22282E"/>
-                </a:solidFill>
-              </a:rPr>
-              <a:t>•  Se incluye la verificación ASVS de un conjunto de requisitos L1/L2 con evidencia de cumple/no cumple.</a:t>
-            </a:r>
-          </a:p>
-          <a:p>
-            <a:pPr>
-              <a:spcAft>
-                <a:spcPts val="600"/>
-              </a:spcAft>
-            </a:pPr>
-            <a:r>
-              <a:rPr sz="1500">
-                <a:solidFill>
-                  <a:srgbClr val="22282E"/>
-                </a:solidFill>
-              </a:rPr>
-              <a:t>•  El informe tiene resumen ejecutivo sin jerga y tabla priorizada de remediación.</a:t>
+              <a:t>•  Entorno de laboratorio propio con una aplicación deliberadamente vulnerable de práctica:</a:t>
+            </a:r>
+          </a:p>
+          <a:p>
+            <a:pPr>
+              <a:spcAft>
+                <a:spcPts val="600"/>
+              </a:spcAft>
+            </a:pPr>
+            <a:r>
+              <a:rPr sz="1500">
+                <a:solidFill>
+                  <a:srgbClr val="22282E"/>
+                </a:solidFill>
+              </a:rPr>
+              <a:t>•  App de práctica intencionalmente insegura (p. ej. OWASP Juice Shop o WebGoat) desplegada solo en local/laboratorio.</a:t>
+            </a:r>
+          </a:p>
+          <a:p>
+            <a:pPr>
+              <a:spcAft>
+                <a:spcPts val="600"/>
+              </a:spcAft>
+            </a:pPr>
+            <a:r>
+              <a:rPr sz="1500">
+                <a:solidFill>
+                  <a:srgbClr val="22282E"/>
+                </a:solidFill>
+              </a:rPr>
+              <a:t>•  SAST: Semgrep o SonarQube sobre el código de la app de práctica.</a:t>
+            </a:r>
+          </a:p>
+          <a:p>
+            <a:pPr>
+              <a:spcAft>
+                <a:spcPts val="600"/>
+              </a:spcAft>
+            </a:pPr>
+            <a:r>
+              <a:rPr sz="1500">
+                <a:solidFill>
+                  <a:srgbClr val="22282E"/>
+                </a:solidFill>
+              </a:rPr>
+              <a:t>•  DAST: OWASP ZAP en modo pasivo/activo contra la app de laboratorio.</a:t>
+            </a:r>
+          </a:p>
+          <a:p>
+            <a:pPr>
+              <a:spcAft>
+                <a:spcPts val="600"/>
+              </a:spcAft>
+            </a:pPr>
+            <a:r>
+              <a:rPr sz="1500">
+                <a:solidFill>
+                  <a:srgbClr val="22282E"/>
+                </a:solidFill>
+              </a:rPr>
+              <a:t>•  SCA: OWASP Dependency-Check o npm audit/pip-audit según el stack.</a:t>
+            </a:r>
+          </a:p>
+          <a:p>
+            <a:pPr>
+              <a:spcAft>
+                <a:spcPts val="600"/>
+              </a:spcAft>
+            </a:pPr>
+            <a:r>
+              <a:rPr sz="1500">
+                <a:solidFill>
+                  <a:srgbClr val="22282E"/>
+                </a:solidFill>
+              </a:rPr>
+              <a:t>•  Checklist ASVS (OWASP) y una hoja de cálculo de gestión de hallazgos (ID, título, severidad, CWE, estado, SLA).</a:t>
             </a:r>
           </a:p>
         </p:txBody>
